--- a/Б.7.5_Модули/Б.7.5_Модуль3_Строительство_и_надзор.pptx
+++ b/Б.7.5_Модули/Б.7.5_Модуль3_Строительство_и_надзор.pptx
@@ -4303,7 +4303,7 @@
                 </a:solidFill>
                 <a:latin typeface="Inter"/>
               </a:rPr>
-              <a:t>Подготовка трассы, траншеи, способы прокладки (подземная, наземная, в коллекторах).</a:t>
+              <a:t>СМР — по проекту и технологическим картам; при отступлениях работы приостанавливаются (ТР п. 56–57).</a:t>
             </a:r>
           </a:p>
         </p:txBody>
@@ -4373,7 +4373,7 @@
                 </a:solidFill>
                 <a:latin typeface="Inter"/>
               </a:rPr>
-              <a:t>Монтаж стальных и полиэтиленовых газопроводов; требования к стыковым соединениям.</a:t>
+              <a:t>Сварка при СМР: герметичность, запрет швов в стенах, НК аттестованным контролёром (ТР п. 58–60).</a:t>
             </a:r>
           </a:p>
         </p:txBody>
@@ -4443,7 +4443,7 @@
                 </a:solidFill>
                 <a:latin typeface="Inter"/>
               </a:rPr>
-              <a:t>Строительный контроль и авторский надзор; журналы работ и акты скрытых работ.</a:t>
+              <a:t>Газоопасные работы: врезка, пуск газа, снятие заглушек, сварка на действующих газопроводах (ФНП № 531, п. 129).</a:t>
             </a:r>
           </a:p>
         </p:txBody>
@@ -4513,7 +4513,7 @@
                 </a:solidFill>
                 <a:latin typeface="Inter"/>
               </a:rPr>
-              <a:t>Реконструкция изношенных газопроводов; методы бестраншейной замены и параллельной прокладки.</a:t>
+              <a:t>Охранные зоны: запрет обработки почвы &gt; 0,3 м без разрешения эксплуатационной организации (ПП РФ № 878, п. 14, 16).</a:t>
             </a:r>
           </a:p>
         </p:txBody>
@@ -4792,7 +4792,7 @@
                 </a:solidFill>
                 <a:latin typeface="Inter"/>
               </a:rPr>
-              <a:t>Капитальный ремонт и техническое перевооружение выполняются по проекту или технической документации с отключением и продувкой участков, оформлением нарядов-допусков на газоопасные работы. Консервация и расконсервация газопроводов — по регламенту с испытаниями перед пуском газа.</a:t>
+              <a:t>Перед ремонтом оборудование отключается от действующих газопроводов с установкой заглушки после запорной арматуры (ФНП № 531, п. 40). После ремонта — испытания по проекту (ФНП № 531, п. 41). Консервация — по проекту с уведомлением Ростехнадзора (ТР п. 81–85). Снятие заглушек — после испытаний на прочность и герметичность (ФНП № 531, п. 50).</a:t>
             </a:r>
           </a:p>
         </p:txBody>
@@ -4827,7 +4827,7 @@
                 </a:solidFill>
                 <a:latin typeface="Inter"/>
               </a:rPr>
-              <a:t>Запрещается ввод в эксплуатацию объектов без испытаний и оформления исполнительной документации.</a:t>
+              <a:t>Ввод в эксплуатацию без испытаний и исполнительной документации не допускается (ТР п. 61).</a:t>
             </a:r>
           </a:p>
         </p:txBody>
@@ -5071,7 +5071,7 @@
                 </a:solidFill>
                 <a:latin typeface="Inter"/>
               </a:rPr>
-              <a:t>Перечень газоопасных работ: врезка, пуск газа, снятие заглушек, сварка на действующих газопроводах.</a:t>
+              <a:t>Газоопасные работы — по наряду-допуску; перечень утверждается руководителем (ФНП № 531, п. 129, 132–133).</a:t>
             </a:r>
           </a:p>
         </p:txBody>
@@ -5141,7 +5141,7 @@
                 </a:solidFill>
                 <a:latin typeface="Inter"/>
               </a:rPr>
-              <a:t>Наряд-допуск и план газоопасных работ; роли ответственного руководителя и исполнителей.</a:t>
+              <a:t>Наряд-допуск: срок действия, инструктаж, анализ газовоздушной смеси в колодцах и ПРГ (ФНП № 531, п. 140, 146).</a:t>
             </a:r>
           </a:p>
         </p:txBody>
@@ -5211,7 +5211,7 @@
                 </a:solidFill>
                 <a:latin typeface="Inter"/>
               </a:rPr>
-              <a:t>Правила охраны газораспределительных сетей (ПП РФ № 878): охранная зона, ограничения для земляных работ.</a:t>
+              <a:t>Охранные зоны: 2 м от наружных газопроводов; ограничения на строительство и земляные работы (ПП РФ № 878, п. 7, 14).</a:t>
             </a:r>
           </a:p>
         </p:txBody>
@@ -5281,7 +5281,7 @@
                 </a:solidFill>
                 <a:latin typeface="Inter"/>
               </a:rPr>
-              <a:t>Действия при повреждении газопровода третьими лицами; аварийно-диспетчерское обеспечение.</a:t>
+              <a:t>При повреждении газопровода — аварийно-восстановительные работы по ПМЛА (ФНП № 531, п. 139).</a:t>
             </a:r>
           </a:p>
         </p:txBody>
@@ -5560,7 +5560,7 @@
                 </a:solidFill>
                 <a:latin typeface="Inter"/>
               </a:rPr>
-              <a:t>СМР выполняются по проекту с обязательным строительным контролем.</a:t>
+              <a:t>СМР — строго по проекту; при отступлениях работы приостанавливаются (ТР п. 56–57).</a:t>
             </a:r>
           </a:p>
         </p:txBody>
@@ -5630,7 +5630,7 @@
                 </a:solidFill>
                 <a:latin typeface="Inter"/>
               </a:rPr>
-              <a:t>Газоопасные работы — только по наряду-допуску и плану.</a:t>
+              <a:t>Сварка при СМР — НК обязателен; сварные швы в стенах запрещены (ТР п. 58–60).</a:t>
             </a:r>
           </a:p>
         </p:txBody>
@@ -5700,7 +5700,7 @@
                 </a:solidFill>
                 <a:latin typeface="Inter"/>
               </a:rPr>
-              <a:t>Охранная зона газопровода (ПП РФ № 878) ограничивает сторонние работы.</a:t>
+              <a:t>Газоопасные работы — по наряду-допуску (ФНП № 531, п. 129, 132); ограничения в охранных зонах — ПП РФ № 878.</a:t>
             </a:r>
           </a:p>
         </p:txBody>
@@ -5770,7 +5770,7 @@
                 </a:solidFill>
                 <a:latin typeface="Inter"/>
               </a:rPr>
-              <a:t>Капремонт и ТПВ требуют отключения, продувки и испытаний перед пуском.</a:t>
+              <a:t>Консервация/расконсервация — по проекту, с испытаниями перед пуском (ТР п. 81–85; ФНП № 531, п. 50).</a:t>
             </a:r>
           </a:p>
         </p:txBody>

--- a/Б.7.5_Модули/Б.7.5_Модуль3_Строительство_и_надзор.pptx
+++ b/Б.7.5_Модули/Б.7.5_Модуль3_Строительство_и_надзор.pptx
@@ -3310,7 +3310,7 @@
                 </a:solidFill>
                 <a:latin typeface="Inter"/>
               </a:rPr>
-              <a:t>Объём модуля: 6 академических часов</a:t>
+              <a:t>Объём модуля: 10 академических часов</a:t>
             </a:r>
           </a:p>
         </p:txBody>
@@ -4373,7 +4373,7 @@
                 </a:solidFill>
                 <a:latin typeface="Inter"/>
               </a:rPr>
-              <a:t>Сварка при СМР: герметичность, запрет швов в стенах, НК аттестованным контролёром (ТР п. 58–60).</a:t>
+              <a:t>Материалы и технологии — по проекту; исполнительная документация отражает фактически выполненные работы (ТР п. 56–57).</a:t>
             </a:r>
           </a:p>
         </p:txBody>
@@ -4443,7 +4443,7 @@
                 </a:solidFill>
                 <a:latin typeface="Inter"/>
               </a:rPr>
-              <a:t>Газоопасные работы: врезка, пуск газа, снятие заглушек, сварка на действующих газопроводах (ФНП № 531, п. 129).</a:t>
+              <a:t>Технический надзор Ростехнадзора при строительстве, реконструкции и капремонте (ТР п. 2, 88).</a:t>
             </a:r>
           </a:p>
         </p:txBody>
@@ -4792,7 +4792,7 @@
                 </a:solidFill>
                 <a:latin typeface="Inter"/>
               </a:rPr>
-              <a:t>Перед ремонтом оборудование отключается от действующих газопроводов с установкой заглушки после запорной арматуры (ФНП № 531, п. 40). После ремонта — испытания по проекту (ФНП № 531, п. 41). Консервация — по проекту с уведомлением Ростехнадзора (ТР п. 81–85). Снятие заглушек — после испытаний на прочность и герметичность (ФНП № 531, п. 50).</a:t>
+              <a:t>Капитальный ремонт и техническое перевооружение выполняются на основании проектной документации (ФНП № 531, п. 2–4). Консервация — по проекту с уведомлением Ростехнадзора (ТР п. 81–85). Приёмка объекта — приемочной комиссией с представителем Ростехнадзора (ТР п. 93). К материалам идентификации относятся проект, экспертиза, исполнительная документация, акт приёмки, разрешение на ввод (ТР п. 12–13).</a:t>
             </a:r>
           </a:p>
         </p:txBody>
@@ -4827,7 +4827,7 @@
                 </a:solidFill>
                 <a:latin typeface="Inter"/>
               </a:rPr>
-              <a:t>Ввод в эксплуатацию без испытаний и исполнительной документации не допускается (ТР п. 61).</a:t>
+              <a:t>Ввод в эксплуатацию без исполнительной документации и акта приёмки не допускается.</a:t>
             </a:r>
           </a:p>
         </p:txBody>
@@ -5001,7 +5001,7 @@
                 </a:solidFill>
                 <a:latin typeface="Inter"/>
               </a:rPr>
-              <a:t>Газоопасные работы и охрана газопроводов</a:t>
+              <a:t>Технический надзор и охранные зоны при СМР</a:t>
             </a:r>
           </a:p>
         </p:txBody>
@@ -5071,7 +5071,7 @@
                 </a:solidFill>
                 <a:latin typeface="Inter"/>
               </a:rPr>
-              <a:t>Газоопасные работы — по наряду-допуску; перечень утверждается руководителем (ФНП № 531, п. 129, 132–133).</a:t>
+              <a:t>Государственный контроль (надзор) Ростехнадзора при СМР, реконструкции и капремонте (ТР п. 2, 88).</a:t>
             </a:r>
           </a:p>
         </p:txBody>
@@ -5141,7 +5141,7 @@
                 </a:solidFill>
                 <a:latin typeface="Inter"/>
               </a:rPr>
-              <a:t>Наряд-допуск: срок действия, инструктаж, анализ газовоздушной смеси в колодцах и ПРГ (ФНП № 531, п. 140, 146).</a:t>
+              <a:t>Строительный контроль застройщика: соответствие проекту, качество материалов, исполнительная документация.</a:t>
             </a:r>
           </a:p>
         </p:txBody>
@@ -5630,7 +5630,7 @@
                 </a:solidFill>
                 <a:latin typeface="Inter"/>
               </a:rPr>
-              <a:t>Сварка при СМР — НК обязателен; сварные швы в стенах запрещены (ТР п. 58–60).</a:t>
+              <a:t>Технический надзор Ростехнадзора при строительстве, реконструкции и капремонте (ТР п. 2, 88).</a:t>
             </a:r>
           </a:p>
         </p:txBody>
@@ -5700,7 +5700,7 @@
                 </a:solidFill>
                 <a:latin typeface="Inter"/>
               </a:rPr>
-              <a:t>Газоопасные работы — по наряду-допуску (ФНП № 531, п. 129, 132); ограничения в охранных зонах — ПП РФ № 878.</a:t>
+              <a:t>Охранные зоны: ограничения на земляные работы без разрешения эксплуатационной организации (ПП РФ № 878).</a:t>
             </a:r>
           </a:p>
         </p:txBody>
@@ -5770,7 +5770,7 @@
                 </a:solidFill>
                 <a:latin typeface="Inter"/>
               </a:rPr>
-              <a:t>Консервация/расконсервация — по проекту, с испытаниями перед пуском (ТР п. 81–85; ФНП № 531, п. 50).</a:t>
+              <a:t>Капремонт, ТПВ, консервация — по проекту; приёмка — комиссией (ТР п. 81–85, 93).</a:t>
             </a:r>
           </a:p>
         </p:txBody>
